--- a/ViennaRNA_講習_事前準備_インストール手順_v2.0.pptx
+++ b/ViennaRNA_講習_事前準備_インストール手順_v2.0.pptx
@@ -3645,7 +3645,7 @@
               <a:buNone/>
             </a:pPr>
             <a:r>
-              <a:rPr lang="en-US" sz="1400" i="1" dirty="0">
+              <a:rPr lang="en-US" sz="1300" i="1" dirty="0">
                 <a:solidFill>
                   <a:srgbClr val="5C6B73"/>
                 </a:solidFill>
@@ -3655,7 +3655,7 @@
               </a:rPr>
               <a:t># 手順 2: プロジェクトを作る（好きな場所で）</a:t>
             </a:r>
-            <a:endParaRPr lang="en-US" sz="1400" dirty="0"/>
+            <a:endParaRPr lang="en-US" sz="1300" dirty="0"/>
           </a:p>
           <a:p>
             <a:pPr indent="0" marL="0">
@@ -3665,7 +3665,7 @@
               <a:buNone/>
             </a:pPr>
             <a:r>
-              <a:rPr lang="en-US" sz="1400" dirty="0">
+              <a:rPr lang="en-US" sz="1300" dirty="0">
                 <a:solidFill>
                   <a:srgbClr val="1F2A30"/>
                 </a:solidFill>
@@ -3675,7 +3675,7 @@
               </a:rPr>
               <a:t>uv init viennarna-course --python 3.13</a:t>
             </a:r>
-            <a:endParaRPr lang="en-US" sz="1400" dirty="0"/>
+            <a:endParaRPr lang="en-US" sz="1300" dirty="0"/>
           </a:p>
           <a:p>
             <a:pPr indent="0" marL="0">
@@ -3685,7 +3685,7 @@
               <a:buNone/>
             </a:pPr>
             <a:r>
-              <a:rPr lang="en-US" sz="1400" dirty="0">
+              <a:rPr lang="en-US" sz="1300" dirty="0">
                 <a:solidFill>
                   <a:srgbClr val="1F2A30"/>
                 </a:solidFill>
@@ -3695,7 +3695,7 @@
               </a:rPr>
               <a:t>cd viennarna-course</a:t>
             </a:r>
-            <a:endParaRPr lang="en-US" sz="1400" dirty="0"/>
+            <a:endParaRPr lang="en-US" sz="1300" dirty="0"/>
           </a:p>
           <a:p>
             <a:pPr indent="0" marL="0">
@@ -3705,7 +3705,7 @@
               <a:buNone/>
             </a:pPr>
             <a:r>
-              <a:rPr lang="en-US" sz="1400" dirty="0">
+              <a:rPr lang="en-US" sz="1300" dirty="0">
                 <a:solidFill>
                   <a:srgbClr val="1F2A30"/>
                 </a:solidFill>
@@ -3715,7 +3715,7 @@
               </a:rPr>
               <a:t> </a:t>
             </a:r>
-            <a:endParaRPr lang="en-US" sz="1400" dirty="0"/>
+            <a:endParaRPr lang="en-US" sz="1300" dirty="0"/>
           </a:p>
           <a:p>
             <a:pPr indent="0" marL="0">
@@ -3725,7 +3725,7 @@
               <a:buNone/>
             </a:pPr>
             <a:r>
-              <a:rPr lang="en-US" sz="1400" i="1" dirty="0">
+              <a:rPr lang="en-US" sz="1300" i="1" dirty="0">
                 <a:solidFill>
                   <a:srgbClr val="5C6B73"/>
                 </a:solidFill>
@@ -3735,7 +3735,7 @@
               </a:rPr>
               <a:t># 手順 3: ViennaRNA（Python バインディング）を入れる</a:t>
             </a:r>
-            <a:endParaRPr lang="en-US" sz="1400" dirty="0"/>
+            <a:endParaRPr lang="en-US" sz="1300" dirty="0"/>
           </a:p>
           <a:p>
             <a:pPr indent="0" marL="0">
@@ -3745,7 +3745,7 @@
               <a:buNone/>
             </a:pPr>
             <a:r>
-              <a:rPr lang="en-US" sz="1400" dirty="0">
+              <a:rPr lang="en-US" sz="1300" dirty="0">
                 <a:solidFill>
                   <a:srgbClr val="1F2A30"/>
                 </a:solidFill>
@@ -3755,7 +3755,7 @@
               </a:rPr>
               <a:t>uv add viennarna==2.7.2</a:t>
             </a:r>
-            <a:endParaRPr lang="en-US" sz="1400" dirty="0"/>
+            <a:endParaRPr lang="en-US" sz="1300" dirty="0"/>
           </a:p>
           <a:p>
             <a:pPr indent="0" marL="0">
@@ -3765,7 +3765,7 @@
               <a:buNone/>
             </a:pPr>
             <a:r>
-              <a:rPr lang="en-US" sz="1400" dirty="0">
+              <a:rPr lang="en-US" sz="1300" dirty="0">
                 <a:solidFill>
                   <a:srgbClr val="1F2A30"/>
                 </a:solidFill>
@@ -3775,7 +3775,7 @@
               </a:rPr>
               <a:t> </a:t>
             </a:r>
-            <a:endParaRPr lang="en-US" sz="1400" dirty="0"/>
+            <a:endParaRPr lang="en-US" sz="1300" dirty="0"/>
           </a:p>
           <a:p>
             <a:pPr indent="0" marL="0">
@@ -3785,7 +3785,7 @@
               <a:buNone/>
             </a:pPr>
             <a:r>
-              <a:rPr lang="en-US" sz="1400" i="1" dirty="0">
+              <a:rPr lang="en-US" sz="1300" i="1" dirty="0">
                 <a:solidFill>
                   <a:srgbClr val="5C6B73"/>
                 </a:solidFill>
@@ -3795,7 +3795,7 @@
               </a:rPr>
               <a:t># exercises フォルダを GitHub から入手してここにコピー</a:t>
             </a:r>
-            <a:endParaRPr lang="en-US" sz="1400" dirty="0"/>
+            <a:endParaRPr lang="en-US" sz="1300" dirty="0"/>
           </a:p>
           <a:p>
             <a:pPr indent="0" marL="0">
@@ -3805,7 +3805,7 @@
               <a:buNone/>
             </a:pPr>
             <a:r>
-              <a:rPr lang="en-US" sz="1400" i="1" dirty="0">
+              <a:rPr lang="en-US" sz="1300" i="1" dirty="0">
                 <a:solidFill>
                   <a:srgbClr val="5C6B73"/>
                 </a:solidFill>
@@ -3815,7 +3815,7 @@
               </a:rPr>
               <a:t>#   https://github.com/Shunsuke-1994/Course_RNAinverse</a:t>
             </a:r>
-            <a:endParaRPr lang="en-US" sz="1400" dirty="0"/>
+            <a:endParaRPr lang="en-US" sz="1300" dirty="0"/>
           </a:p>
           <a:p>
             <a:pPr indent="0" marL="0">
@@ -3825,7 +3825,7 @@
               <a:buNone/>
             </a:pPr>
             <a:r>
-              <a:rPr lang="en-US" sz="1400" i="1" dirty="0">
+              <a:rPr lang="en-US" sz="1300" i="1" dirty="0">
                 <a:solidFill>
                   <a:srgbClr val="5C6B73"/>
                 </a:solidFill>
@@ -3835,7 +3835,47 @@
               </a:rPr>
               <a:t>#   緑の Code ボタン → Download ZIP → 展開</a:t>
             </a:r>
-            <a:endParaRPr lang="en-US" sz="1400" dirty="0"/>
+            <a:endParaRPr lang="en-US" sz="1300" dirty="0"/>
+          </a:p>
+          <a:p>
+            <a:pPr indent="0" marL="0">
+              <a:lnSpc>
+                <a:spcPct val="105000"/>
+              </a:lnSpc>
+              <a:buNone/>
+            </a:pPr>
+            <a:r>
+              <a:rPr lang="en-US" sz="1300" i="1" dirty="0">
+                <a:solidFill>
+                  <a:srgbClr val="5C6B73"/>
+                </a:solidFill>
+                <a:latin typeface="Consolas" pitchFamily="34" charset="0"/>
+                <a:ea typeface="Consolas" pitchFamily="34" charset="-122"/>
+                <a:cs typeface="Consolas" pitchFamily="34" charset="-120"/>
+              </a:rPr>
+              <a:t>#   git を使う人は次の 1 行でも入手できる:</a:t>
+            </a:r>
+            <a:endParaRPr lang="en-US" sz="1300" dirty="0"/>
+          </a:p>
+          <a:p>
+            <a:pPr indent="0" marL="0">
+              <a:lnSpc>
+                <a:spcPct val="105000"/>
+              </a:lnSpc>
+              <a:buNone/>
+            </a:pPr>
+            <a:r>
+              <a:rPr lang="en-US" sz="1300" i="1" dirty="0">
+                <a:solidFill>
+                  <a:srgbClr val="5C6B73"/>
+                </a:solidFill>
+                <a:latin typeface="Consolas" pitchFamily="34" charset="0"/>
+                <a:ea typeface="Consolas" pitchFamily="34" charset="-122"/>
+                <a:cs typeface="Consolas" pitchFamily="34" charset="-120"/>
+              </a:rPr>
+              <a:t>#   git clone https://github.com/Shunsuke-1994/Course_RNAinverse.git</a:t>
+            </a:r>
+            <a:endParaRPr lang="en-US" sz="1300" dirty="0"/>
           </a:p>
         </p:txBody>
       </p:sp>

--- a/ViennaRNA_講習_事前準備_インストール手順_v2.0.pptx
+++ b/ViennaRNA_講習_事前準備_インストール手順_v2.0.pptx
@@ -10,9 +10,10 @@
     <p:sldId id="258" r:id="rId4"/>
     <p:sldId id="259" r:id="rId5"/>
     <p:sldId id="260" r:id="rId6"/>
+    <p:sldId id="261" r:id="rId7"/>
   </p:sldIdLst>
   <p:notesMasterIdLst>
-    <p:notesMasterId r:id="rId7"/>
+    <p:notesMasterId r:id="rId8"/>
   </p:notesMasterIdLst>
   <p:sldSz cx="12192000" cy="6858000"/>
   <p:notesSz cx="6858000" cy="12192000"/>
@@ -915,6 +916,102 @@
             <a:fld id="{F7021451-1387-4CA6-816F-3879F97B5CBC}" type="slidenum">
               <a:rPr lang="en-US"/>
               <a:t>5</a:t>
+            </a:fld>
+            <a:endParaRPr lang="en-US"/>
+          </a:p>
+        </p:txBody>
+      </p:sp>
+    </p:spTree>
+    <p:extLst>
+      <p:ext uri="{BB962C8B-B14F-4D97-AF65-F5344CB8AC3E}">
+        <p14:creationId xmlns:p14="http://schemas.microsoft.com/office/powerpoint/2010/main" val="1024086991"/>
+      </p:ext>
+    </p:extLst>
+  </p:cSld>
+  <p:clrMapOvr>
+    <a:masterClrMapping/>
+  </p:clrMapOvr>
+</p:notes>
+</file>
+
+<file path=ppt/notesSlides/notesSlide6.xml><?xml version="1.0" encoding="utf-8"?>
+<p:notes xmlns:a="http://schemas.openxmlformats.org/drawingml/2006/main" xmlns:r="http://schemas.openxmlformats.org/officeDocument/2006/relationships" xmlns:p="http://schemas.openxmlformats.org/presentationml/2006/main">
+  <p:cSld>
+    <p:spTree>
+      <p:nvGrpSpPr>
+        <p:cNvPr id="1" name=""/>
+        <p:cNvGrpSpPr/>
+        <p:nvPr/>
+      </p:nvGrpSpPr>
+      <p:grpSpPr>
+        <a:xfrm>
+          <a:off x="0" y="0"/>
+          <a:ext cx="0" cy="0"/>
+          <a:chOff x="0" y="0"/>
+          <a:chExt cx="0" cy="0"/>
+        </a:xfrm>
+      </p:grpSpPr>
+      <p:sp>
+        <p:nvSpPr>
+          <p:cNvPr id="2" name="Slide Image Placeholder 1"/>
+          <p:cNvSpPr>
+            <a:spLocks noGrp="1" noRot="1" noChangeAspect="1"/>
+          </p:cNvSpPr>
+          <p:nvPr>
+            <p:ph type="sldImg"/>
+          </p:nvPr>
+        </p:nvSpPr>
+        <p:spPr/>
+      </p:sp>
+      <p:sp>
+        <p:nvSpPr>
+          <p:cNvPr id="3" name="Notes Placeholder 2"/>
+          <p:cNvSpPr>
+            <a:spLocks noGrp="1"/>
+          </p:cNvSpPr>
+          <p:nvPr>
+            <p:ph type="body" idx="1"/>
+          </p:nvPr>
+        </p:nvSpPr>
+        <p:spPr/>
+        <p:txBody>
+          <a:bodyPr/>
+          <a:lstStyle/>
+          <a:p>
+            <a:r>
+              <a:rPr lang="en-US" dirty="0"/>
+              <a:t>【所要時間】事前配布（当日は 1 分）
+【説明の要点】
+・スライド（最新版）、事前準備の手順、演習スクリプト（exercises/）をまとめて公開している。ダウンロードすればそのまま使える。
+・ZIP：緑の Code ボタン → Download ZIP → 展開し、中の exercises/ を viennarna-course/ にコピーする。
+・git clone した場合は、そのフォルダで uv sync を 1 回実行すれば Python 3.13 と viennarna 2.7.2 が入り、そのまま演習を実行できる（viennarna-course を作らなくてよい）。
+・質問は GitHub の Issues で受け付ける。講義後も対応する。投稿には GitHub アカウントが必要。Issues は公開されるので個人情報は書かないよう伝える。
+【参照】
+・https://github.com/Shunsuke-1994/Course_RNAinverse
+・https://github.com/Shunsuke-1994/Course_RNAinverse/issues</a:t>
+            </a:r>
+            <a:endParaRPr lang="en-US" dirty="0"/>
+          </a:p>
+        </p:txBody>
+      </p:sp>
+      <p:sp>
+        <p:nvSpPr>
+          <p:cNvPr id="4" name="Slide Number Placeholder 3"/>
+          <p:cNvSpPr>
+            <a:spLocks noGrp="1"/>
+          </p:cNvSpPr>
+          <p:nvPr>
+            <p:ph type="sldNum" sz="quarter" idx="10"/>
+          </p:nvPr>
+        </p:nvSpPr>
+        <p:spPr/>
+        <p:txBody>
+          <a:bodyPr/>
+          <a:lstStyle/>
+          <a:p>
+            <a:fld id="{F7021451-1387-4CA6-816F-3879F97B5CBC}" type="slidenum">
+              <a:rPr lang="en-US"/>
+              <a:t>6</a:t>
             </a:fld>
             <a:endParaRPr lang="en-US"/>
           </a:p>
@@ -1418,7 +1515,7 @@
                 <a:ea typeface="Meiryo" pitchFamily="34" charset="-122"/>
                 <a:cs typeface="Meiryo" pitchFamily="34" charset="-120"/>
               </a:rPr>
-              <a:t>当日までに 4 ページの手順で環境を用意し、最後の動作確認まで済ませてください（所要 10〜15 分）</a:t>
+              <a:t>当日までに手順 1〜4 で環境を用意し、最後の動作確認まで済ませてください（所要 10〜15 分）</a:t>
             </a:r>
             <a:endParaRPr lang="en-US" sz="2000" dirty="0"/>
           </a:p>
@@ -6316,6 +6413,765 @@
                 <a:cs typeface="Meiryo" pitchFamily="34" charset="-120"/>
               </a:rPr>
               <a:t>動かなくても参加可。TA・グループの画面で結果を比較する</a:t>
+            </a:r>
+            <a:endParaRPr lang="en-US" sz="1400" dirty="0"/>
+          </a:p>
+        </p:txBody>
+      </p:sp>
+    </p:spTree>
+  </p:cSld>
+  <p:clrMapOvr>
+    <a:masterClrMapping/>
+  </p:clrMapOvr>
+</p:sld>
+</file>
+
+<file path=ppt/slides/slide6.xml><?xml version="1.0" encoding="utf-8"?>
+<p:sld xmlns:a="http://schemas.openxmlformats.org/drawingml/2006/main" xmlns:r="http://schemas.openxmlformats.org/officeDocument/2006/relationships" xmlns:p="http://schemas.openxmlformats.org/presentationml/2006/main">
+  <p:cSld name="Slide 6">
+    <p:bg>
+      <p:bgPr>
+        <a:solidFill>
+          <a:srgbClr val="FFFFFF"/>
+        </a:solidFill>
+      </p:bgPr>
+    </p:bg>
+    <p:spTree>
+      <p:nvGrpSpPr>
+        <p:cNvPr id="1" name=""/>
+        <p:cNvGrpSpPr/>
+        <p:nvPr/>
+      </p:nvGrpSpPr>
+      <p:grpSpPr>
+        <a:xfrm>
+          <a:off x="0" y="0"/>
+          <a:ext cx="0" cy="0"/>
+          <a:chOff x="0" y="0"/>
+          <a:chExt cx="0" cy="0"/>
+        </a:xfrm>
+      </p:grpSpPr>
+      <p:sp>
+        <p:nvSpPr>
+          <p:cNvPr id="2" name="Text 0"/>
+          <p:cNvSpPr txBox="1"/>
+          <p:nvPr/>
+        </p:nvSpPr>
+        <p:spPr>
+          <a:xfrm>
+            <a:off x="502920" y="256032"/>
+            <a:ext cx="11155680" cy="685800"/>
+          </a:xfrm>
+          <a:prstGeom prst="rect">
+            <a:avLst/>
+          </a:prstGeom>
+          <a:noFill/>
+          <a:ln/>
+        </p:spPr>
+        <p:txBody>
+          <a:bodyPr wrap="square" lIns="0" tIns="0" rIns="0" bIns="0" rtlCol="0" anchor="ctr"/>
+          <a:lstStyle/>
+          <a:p>
+            <a:pPr indent="0" marL="0">
+              <a:buNone/>
+            </a:pPr>
+            <a:r>
+              <a:rPr lang="en-US" sz="2800" b="1" dirty="0">
+                <a:solidFill>
+                  <a:srgbClr val="0F4C5C"/>
+                </a:solidFill>
+                <a:latin typeface="Meiryo" pitchFamily="34" charset="0"/>
+                <a:ea typeface="Meiryo" pitchFamily="34" charset="-122"/>
+                <a:cs typeface="Meiryo" pitchFamily="34" charset="-120"/>
+              </a:rPr>
+              <a:t>資料と演習スクリプトは GitHub に置いてあります</a:t>
+            </a:r>
+            <a:endParaRPr lang="en-US" sz="2800" dirty="0"/>
+          </a:p>
+        </p:txBody>
+      </p:sp>
+      <p:sp>
+        <p:nvSpPr>
+          <p:cNvPr id="3" name="Text 1"/>
+          <p:cNvSpPr txBox="1"/>
+          <p:nvPr/>
+        </p:nvSpPr>
+        <p:spPr>
+          <a:xfrm>
+            <a:off x="502920" y="6446520"/>
+            <a:ext cx="5486400" cy="274320"/>
+          </a:xfrm>
+          <a:prstGeom prst="rect">
+            <a:avLst/>
+          </a:prstGeom>
+          <a:noFill/>
+          <a:ln/>
+        </p:spPr>
+        <p:txBody>
+          <a:bodyPr wrap="square" lIns="0" tIns="0" rIns="0" bIns="0" rtlCol="0" anchor="ctr"/>
+          <a:lstStyle/>
+          <a:p>
+            <a:pPr indent="0" marL="0">
+              <a:buNone/>
+            </a:pPr>
+            <a:r>
+              <a:rPr lang="en-US" sz="1100" dirty="0">
+                <a:solidFill>
+                  <a:srgbClr val="5C6B73"/>
+                </a:solidFill>
+                <a:latin typeface="Meiryo" pitchFamily="34" charset="0"/>
+                <a:ea typeface="Meiryo" pitchFamily="34" charset="-122"/>
+                <a:cs typeface="Meiryo" pitchFamily="34" charset="-120"/>
+              </a:rPr>
+              <a:t>事前準備：ViennaRNA 実習環境　資料 v2.0</a:t>
+            </a:r>
+            <a:endParaRPr lang="en-US" sz="1100" dirty="0"/>
+          </a:p>
+        </p:txBody>
+      </p:sp>
+      <p:sp>
+        <p:nvSpPr>
+          <p:cNvPr id="4" name="Text 2"/>
+          <p:cNvSpPr txBox="1"/>
+          <p:nvPr/>
+        </p:nvSpPr>
+        <p:spPr>
+          <a:xfrm>
+            <a:off x="10972800" y="6446520"/>
+            <a:ext cx="731520" cy="274320"/>
+          </a:xfrm>
+          <a:prstGeom prst="rect">
+            <a:avLst/>
+          </a:prstGeom>
+          <a:noFill/>
+          <a:ln/>
+        </p:spPr>
+        <p:txBody>
+          <a:bodyPr wrap="square" lIns="0" tIns="0" rIns="0" bIns="0" rtlCol="0" anchor="ctr"/>
+          <a:lstStyle/>
+          <a:p>
+            <a:pPr algn="r" indent="0" marL="0">
+              <a:buNone/>
+            </a:pPr>
+            <a:r>
+              <a:rPr lang="en-US" sz="1100" dirty="0">
+                <a:solidFill>
+                  <a:srgbClr val="5C6B73"/>
+                </a:solidFill>
+                <a:latin typeface="Meiryo" pitchFamily="34" charset="0"/>
+                <a:ea typeface="Meiryo" pitchFamily="34" charset="-122"/>
+                <a:cs typeface="Meiryo" pitchFamily="34" charset="-120"/>
+              </a:rPr>
+              <a:t>6</a:t>
+            </a:r>
+            <a:endParaRPr lang="en-US" sz="1100" dirty="0"/>
+          </a:p>
+        </p:txBody>
+      </p:sp>
+      <p:sp>
+        <p:nvSpPr>
+          <p:cNvPr id="6" name="Text 3"/>
+          <p:cNvSpPr txBox="1"/>
+          <p:nvPr/>
+        </p:nvSpPr>
+        <p:spPr>
+          <a:xfrm>
+            <a:off x="502920" y="1143000"/>
+            <a:ext cx="11155680" cy="502920"/>
+          </a:xfrm>
+          <a:prstGeom prst="rect">
+            <a:avLst/>
+          </a:prstGeom>
+          <a:noFill/>
+          <a:ln/>
+        </p:spPr>
+        <p:txBody>
+          <a:bodyPr wrap="square" lIns="0" tIns="0" rIns="0" bIns="0" rtlCol="0" anchor="ctr"/>
+          <a:lstStyle/>
+          <a:p>
+            <a:pPr indent="0" marL="0">
+              <a:buNone/>
+            </a:pPr>
+            <a:r>
+              <a:rPr lang="en-US" sz="2400" b="1" dirty="0">
+                <a:solidFill>
+                  <a:srgbClr val="0F4C5C"/>
+                </a:solidFill>
+                <a:latin typeface="Consolas" pitchFamily="34" charset="0"/>
+                <a:ea typeface="Consolas" pitchFamily="34" charset="-122"/>
+                <a:cs typeface="Consolas" pitchFamily="34" charset="-120"/>
+              </a:rPr>
+              <a:t>https://github.com/Shunsuke-1994/Course_RNAinverse</a:t>
+            </a:r>
+            <a:endParaRPr lang="en-US" sz="2400" dirty="0"/>
+          </a:p>
+        </p:txBody>
+      </p:sp>
+      <p:sp>
+        <p:nvSpPr>
+          <p:cNvPr id="7" name="Text 4"/>
+          <p:cNvSpPr txBox="1"/>
+          <p:nvPr/>
+        </p:nvSpPr>
+        <p:spPr>
+          <a:xfrm>
+            <a:off x="502920" y="1783080"/>
+            <a:ext cx="6766560" cy="365760"/>
+          </a:xfrm>
+          <a:prstGeom prst="rect">
+            <a:avLst/>
+          </a:prstGeom>
+          <a:noFill/>
+          <a:ln/>
+        </p:spPr>
+        <p:txBody>
+          <a:bodyPr wrap="square" lIns="0" tIns="0" rIns="0" bIns="0" rtlCol="0" anchor="t"/>
+          <a:lstStyle/>
+          <a:p>
+            <a:pPr indent="0" marL="0">
+              <a:buNone/>
+            </a:pPr>
+            <a:r>
+              <a:rPr lang="en-US" sz="1600" b="1" dirty="0">
+                <a:solidFill>
+                  <a:srgbClr val="0F4C5C"/>
+                </a:solidFill>
+                <a:latin typeface="Meiryo" pitchFamily="34" charset="0"/>
+                <a:ea typeface="Meiryo" pitchFamily="34" charset="-122"/>
+                <a:cs typeface="Meiryo" pitchFamily="34" charset="-120"/>
+              </a:rPr>
+              <a:t>入手方法 A：ZIP でダウンロード（おすすめ）</a:t>
+            </a:r>
+            <a:endParaRPr lang="en-US" sz="1600" dirty="0"/>
+          </a:p>
+        </p:txBody>
+      </p:sp>
+      <p:sp>
+        <p:nvSpPr>
+          <p:cNvPr id="8" name="Text 5"/>
+          <p:cNvSpPr txBox="1"/>
+          <p:nvPr/>
+        </p:nvSpPr>
+        <p:spPr>
+          <a:xfrm>
+            <a:off x="502920" y="2148840"/>
+            <a:ext cx="6766560" cy="640080"/>
+          </a:xfrm>
+          <a:prstGeom prst="rect">
+            <a:avLst/>
+          </a:prstGeom>
+          <a:noFill/>
+          <a:ln/>
+        </p:spPr>
+        <p:txBody>
+          <a:bodyPr wrap="square" lIns="0" tIns="0" rIns="0" bIns="0" rtlCol="0" anchor="t"/>
+          <a:lstStyle/>
+          <a:p>
+            <a:pPr indent="0" marL="0">
+              <a:buNone/>
+            </a:pPr>
+            <a:r>
+              <a:rPr lang="en-US" sz="1400" dirty="0">
+                <a:solidFill>
+                  <a:srgbClr val="1F2A30"/>
+                </a:solidFill>
+                <a:latin typeface="Meiryo" pitchFamily="34" charset="0"/>
+                <a:ea typeface="Meiryo" pitchFamily="34" charset="-122"/>
+                <a:cs typeface="Meiryo" pitchFamily="34" charset="-120"/>
+              </a:rPr>
+              <a:t>緑の Code ボタン → Download ZIP → 展開し、中の exercises/ を viennarna-course/ にコピー（手順 2・3 のフォルダ構成）</a:t>
+            </a:r>
+            <a:endParaRPr lang="en-US" sz="1400" dirty="0"/>
+          </a:p>
+        </p:txBody>
+      </p:sp>
+      <p:sp>
+        <p:nvSpPr>
+          <p:cNvPr id="9" name="Text 6"/>
+          <p:cNvSpPr txBox="1"/>
+          <p:nvPr/>
+        </p:nvSpPr>
+        <p:spPr>
+          <a:xfrm>
+            <a:off x="502920" y="2834640"/>
+            <a:ext cx="6766560" cy="365760"/>
+          </a:xfrm>
+          <a:prstGeom prst="rect">
+            <a:avLst/>
+          </a:prstGeom>
+          <a:noFill/>
+          <a:ln/>
+        </p:spPr>
+        <p:txBody>
+          <a:bodyPr wrap="square" lIns="0" tIns="0" rIns="0" bIns="0" rtlCol="0" anchor="t"/>
+          <a:lstStyle/>
+          <a:p>
+            <a:pPr indent="0" marL="0">
+              <a:buNone/>
+            </a:pPr>
+            <a:r>
+              <a:rPr lang="en-US" sz="1600" b="1" dirty="0">
+                <a:solidFill>
+                  <a:srgbClr val="0F4C5C"/>
+                </a:solidFill>
+                <a:latin typeface="Meiryo" pitchFamily="34" charset="0"/>
+                <a:ea typeface="Meiryo" pitchFamily="34" charset="-122"/>
+                <a:cs typeface="Meiryo" pitchFamily="34" charset="-120"/>
+              </a:rPr>
+              <a:t>入手方法 B：git clone（git を使える人）</a:t>
+            </a:r>
+            <a:endParaRPr lang="en-US" sz="1600" dirty="0"/>
+          </a:p>
+        </p:txBody>
+      </p:sp>
+      <p:sp>
+        <p:nvSpPr>
+          <p:cNvPr id="10" name="Shape 7"/>
+          <p:cNvSpPr/>
+          <p:nvPr/>
+        </p:nvSpPr>
+        <p:spPr>
+          <a:xfrm>
+            <a:off x="502920" y="3200400"/>
+            <a:ext cx="6766560" cy="1143000"/>
+          </a:xfrm>
+          <a:prstGeom prst="rect">
+            <a:avLst/>
+          </a:prstGeom>
+          <a:solidFill>
+            <a:srgbClr val="F6F8F9"/>
+          </a:solidFill>
+          <a:ln w="9525">
+            <a:solidFill>
+              <a:srgbClr val="C9D3D6"/>
+            </a:solidFill>
+            <a:prstDash val="solid"/>
+          </a:ln>
+        </p:spPr>
+      </p:sp>
+      <p:sp>
+        <p:nvSpPr>
+          <p:cNvPr id="11" name="Text 8"/>
+          <p:cNvSpPr txBox="1"/>
+          <p:nvPr/>
+        </p:nvSpPr>
+        <p:spPr>
+          <a:xfrm>
+            <a:off x="612648" y="3273552"/>
+            <a:ext cx="6547104" cy="996696"/>
+          </a:xfrm>
+          <a:prstGeom prst="rect">
+            <a:avLst/>
+          </a:prstGeom>
+          <a:noFill/>
+          <a:ln/>
+        </p:spPr>
+        <p:txBody>
+          <a:bodyPr wrap="square" lIns="0" tIns="0" rIns="0" bIns="0" rtlCol="0" anchor="t"/>
+          <a:lstStyle/>
+          <a:p>
+            <a:pPr indent="0" marL="0">
+              <a:lnSpc>
+                <a:spcPct val="105000"/>
+              </a:lnSpc>
+              <a:buNone/>
+            </a:pPr>
+            <a:r>
+              <a:rPr lang="en-US" sz="1200" dirty="0">
+                <a:solidFill>
+                  <a:srgbClr val="1F2A30"/>
+                </a:solidFill>
+                <a:latin typeface="Consolas" pitchFamily="34" charset="0"/>
+                <a:ea typeface="Consolas" pitchFamily="34" charset="-122"/>
+                <a:cs typeface="Consolas" pitchFamily="34" charset="-120"/>
+              </a:rPr>
+              <a:t>git clone https://github.com/Shunsuke-1994/Course_RNAinverse.git</a:t>
+            </a:r>
+            <a:endParaRPr lang="en-US" sz="1200" dirty="0"/>
+          </a:p>
+          <a:p>
+            <a:pPr indent="0" marL="0">
+              <a:lnSpc>
+                <a:spcPct val="105000"/>
+              </a:lnSpc>
+              <a:buNone/>
+            </a:pPr>
+            <a:r>
+              <a:rPr lang="en-US" sz="1200" dirty="0">
+                <a:solidFill>
+                  <a:srgbClr val="1F2A30"/>
+                </a:solidFill>
+                <a:latin typeface="Consolas" pitchFamily="34" charset="0"/>
+                <a:ea typeface="Consolas" pitchFamily="34" charset="-122"/>
+                <a:cs typeface="Consolas" pitchFamily="34" charset="-120"/>
+              </a:rPr>
+              <a:t>cd Course_RNAinverse</a:t>
+            </a:r>
+            <a:endParaRPr lang="en-US" sz="1200" dirty="0"/>
+          </a:p>
+          <a:p>
+            <a:pPr indent="0" marL="0">
+              <a:lnSpc>
+                <a:spcPct val="105000"/>
+              </a:lnSpc>
+              <a:buNone/>
+            </a:pPr>
+            <a:r>
+              <a:rPr lang="en-US" sz="1200" dirty="0">
+                <a:solidFill>
+                  <a:srgbClr val="1F2A30"/>
+                </a:solidFill>
+                <a:latin typeface="Consolas" pitchFamily="34" charset="0"/>
+                <a:ea typeface="Consolas" pitchFamily="34" charset="-122"/>
+                <a:cs typeface="Consolas" pitchFamily="34" charset="-120"/>
+              </a:rPr>
+              <a:t>uv sync                       # Python 3.13 と viennarna 2.7.2 が入る</a:t>
+            </a:r>
+            <a:endParaRPr lang="en-US" sz="1200" dirty="0"/>
+          </a:p>
+          <a:p>
+            <a:pPr indent="0" marL="0">
+              <a:lnSpc>
+                <a:spcPct val="105000"/>
+              </a:lnSpc>
+              <a:buNone/>
+            </a:pPr>
+            <a:r>
+              <a:rPr lang="en-US" sz="1200" dirty="0">
+                <a:solidFill>
+                  <a:srgbClr val="1F2A30"/>
+                </a:solidFill>
+                <a:latin typeface="Consolas" pitchFamily="34" charset="0"/>
+                <a:ea typeface="Consolas" pitchFamily="34" charset="-122"/>
+                <a:cs typeface="Consolas" pitchFamily="34" charset="-120"/>
+              </a:rPr>
+              <a:t>uv run python exercises/ex0_check.py</a:t>
+            </a:r>
+            <a:endParaRPr lang="en-US" sz="1200" dirty="0"/>
+          </a:p>
+        </p:txBody>
+      </p:sp>
+      <p:sp>
+        <p:nvSpPr>
+          <p:cNvPr id="12" name="Shape 9"/>
+          <p:cNvSpPr/>
+          <p:nvPr/>
+        </p:nvSpPr>
+        <p:spPr>
+          <a:xfrm>
+            <a:off x="7498080" y="1783080"/>
+            <a:ext cx="4206240" cy="2560320"/>
+          </a:xfrm>
+          <a:prstGeom prst="roundRect">
+            <a:avLst>
+              <a:gd name="adj" fmla="val 4286"/>
+            </a:avLst>
+          </a:prstGeom>
+          <a:solidFill>
+            <a:srgbClr val="EEF3F4"/>
+          </a:solidFill>
+          <a:ln w="12700">
+            <a:solidFill>
+              <a:srgbClr val="EEF3F4"/>
+            </a:solidFill>
+            <a:prstDash val="solid"/>
+          </a:ln>
+        </p:spPr>
+      </p:sp>
+      <p:sp>
+        <p:nvSpPr>
+          <p:cNvPr id="13" name="Text 10"/>
+          <p:cNvSpPr txBox="1"/>
+          <p:nvPr/>
+        </p:nvSpPr>
+        <p:spPr>
+          <a:xfrm>
+            <a:off x="7680960" y="1892808"/>
+            <a:ext cx="3840480" cy="411480"/>
+          </a:xfrm>
+          <a:prstGeom prst="rect">
+            <a:avLst/>
+          </a:prstGeom>
+          <a:noFill/>
+          <a:ln/>
+        </p:spPr>
+        <p:txBody>
+          <a:bodyPr wrap="square" lIns="0" tIns="0" rIns="0" bIns="0" rtlCol="0" anchor="ctr"/>
+          <a:lstStyle/>
+          <a:p>
+            <a:pPr indent="0" marL="0">
+              <a:buNone/>
+            </a:pPr>
+            <a:r>
+              <a:rPr lang="en-US" sz="2000" b="1" dirty="0">
+                <a:solidFill>
+                  <a:srgbClr val="0F4C5C"/>
+                </a:solidFill>
+                <a:latin typeface="Meiryo" pitchFamily="34" charset="0"/>
+                <a:ea typeface="Meiryo" pitchFamily="34" charset="-122"/>
+                <a:cs typeface="Meiryo" pitchFamily="34" charset="-120"/>
+              </a:rPr>
+              <a:t>リポジトリの中身</a:t>
+            </a:r>
+            <a:endParaRPr lang="en-US" sz="2000" dirty="0"/>
+          </a:p>
+        </p:txBody>
+      </p:sp>
+      <p:sp>
+        <p:nvSpPr>
+          <p:cNvPr id="14" name="Text 11"/>
+          <p:cNvSpPr txBox="1"/>
+          <p:nvPr/>
+        </p:nvSpPr>
+        <p:spPr>
+          <a:xfrm>
+            <a:off x="7680960" y="2350008"/>
+            <a:ext cx="3840480" cy="1874520"/>
+          </a:xfrm>
+          <a:prstGeom prst="rect">
+            <a:avLst/>
+          </a:prstGeom>
+          <a:noFill/>
+          <a:ln/>
+        </p:spPr>
+        <p:txBody>
+          <a:bodyPr wrap="square" lIns="0" tIns="0" rIns="0" bIns="0" rtlCol="0" anchor="t">
+            <a:normAutofit/>
+          </a:bodyPr>
+          <a:lstStyle/>
+          <a:p>
+            <a:pPr marL="342900" indent="-342900">
+              <a:spcAft>
+                <a:spcPts val="400"/>
+              </a:spcAft>
+              <a:buSzPct val="100000"/>
+              <a:buChar char="•"/>
+            </a:pPr>
+            <a:r>
+              <a:rPr lang="en-US" sz="1400" dirty="0">
+                <a:solidFill>
+                  <a:srgbClr val="1F2A30"/>
+                </a:solidFill>
+                <a:latin typeface="Meiryo" pitchFamily="34" charset="0"/>
+                <a:ea typeface="Meiryo" pitchFamily="34" charset="-122"/>
+                <a:cs typeface="Meiryo" pitchFamily="34" charset="-120"/>
+              </a:rPr>
+              <a:t>講義スライド（PDF、最新版）</a:t>
+            </a:r>
+            <a:endParaRPr lang="en-US" sz="1400" dirty="0"/>
+          </a:p>
+          <a:p>
+            <a:pPr marL="342900" indent="-342900">
+              <a:spcAft>
+                <a:spcPts val="400"/>
+              </a:spcAft>
+              <a:buSzPct val="100000"/>
+              <a:buChar char="•"/>
+            </a:pPr>
+            <a:r>
+              <a:rPr lang="en-US" sz="1400" dirty="0">
+                <a:solidFill>
+                  <a:srgbClr val="1F2A30"/>
+                </a:solidFill>
+                <a:latin typeface="Meiryo" pitchFamily="34" charset="0"/>
+                <a:ea typeface="Meiryo" pitchFamily="34" charset="-122"/>
+                <a:cs typeface="Meiryo" pitchFamily="34" charset="-120"/>
+              </a:rPr>
+              <a:t>事前準備の手順（PDF）</a:t>
+            </a:r>
+            <a:endParaRPr lang="en-US" sz="1400" dirty="0"/>
+          </a:p>
+          <a:p>
+            <a:pPr marL="342900" indent="-342900">
+              <a:spcAft>
+                <a:spcPts val="400"/>
+              </a:spcAft>
+              <a:buSzPct val="100000"/>
+              <a:buChar char="•"/>
+            </a:pPr>
+            <a:r>
+              <a:rPr lang="en-US" sz="1400" dirty="0">
+                <a:solidFill>
+                  <a:srgbClr val="1F2A30"/>
+                </a:solidFill>
+                <a:latin typeface="Meiryo" pitchFamily="34" charset="0"/>
+                <a:ea typeface="Meiryo" pitchFamily="34" charset="-122"/>
+                <a:cs typeface="Meiryo" pitchFamily="34" charset="-120"/>
+              </a:rPr>
+              <a:t>exercises/：演習スクリプトと期待される出力</a:t>
+            </a:r>
+            <a:endParaRPr lang="en-US" sz="1400" dirty="0"/>
+          </a:p>
+          <a:p>
+            <a:pPr marL="342900" indent="-342900">
+              <a:spcAft>
+                <a:spcPts val="400"/>
+              </a:spcAft>
+              <a:buSzPct val="100000"/>
+              <a:buChar char="•"/>
+            </a:pPr>
+            <a:r>
+              <a:rPr lang="en-US" sz="1400" dirty="0">
+                <a:solidFill>
+                  <a:srgbClr val="1F2A30"/>
+                </a:solidFill>
+                <a:latin typeface="Meiryo" pitchFamily="34" charset="0"/>
+                <a:ea typeface="Meiryo" pitchFamily="34" charset="-122"/>
+                <a:cs typeface="Meiryo" pitchFamily="34" charset="-120"/>
+              </a:rPr>
+              <a:t>README：使い方の説明</a:t>
+            </a:r>
+            <a:endParaRPr lang="en-US" sz="1400" dirty="0"/>
+          </a:p>
+        </p:txBody>
+      </p:sp>
+      <p:sp>
+        <p:nvSpPr>
+          <p:cNvPr id="15" name="Shape 12"/>
+          <p:cNvSpPr/>
+          <p:nvPr/>
+        </p:nvSpPr>
+        <p:spPr>
+          <a:xfrm>
+            <a:off x="502920" y="4526280"/>
+            <a:ext cx="11155680" cy="1600200"/>
+          </a:xfrm>
+          <a:prstGeom prst="roundRect">
+            <a:avLst>
+              <a:gd name="adj" fmla="val 6857"/>
+            </a:avLst>
+          </a:prstGeom>
+          <a:solidFill>
+            <a:srgbClr val="FBE9DC"/>
+          </a:solidFill>
+          <a:ln w="12700">
+            <a:solidFill>
+              <a:srgbClr val="FBE9DC"/>
+            </a:solidFill>
+            <a:prstDash val="solid"/>
+          </a:ln>
+        </p:spPr>
+      </p:sp>
+      <p:sp>
+        <p:nvSpPr>
+          <p:cNvPr id="16" name="Text 13"/>
+          <p:cNvSpPr txBox="1"/>
+          <p:nvPr/>
+        </p:nvSpPr>
+        <p:spPr>
+          <a:xfrm>
+            <a:off x="685800" y="4636008"/>
+            <a:ext cx="10789920" cy="411480"/>
+          </a:xfrm>
+          <a:prstGeom prst="rect">
+            <a:avLst/>
+          </a:prstGeom>
+          <a:noFill/>
+          <a:ln/>
+        </p:spPr>
+        <p:txBody>
+          <a:bodyPr wrap="square" lIns="0" tIns="0" rIns="0" bIns="0" rtlCol="0" anchor="ctr"/>
+          <a:lstStyle/>
+          <a:p>
+            <a:pPr indent="0" marL="0">
+              <a:buNone/>
+            </a:pPr>
+            <a:r>
+              <a:rPr lang="en-US" sz="2000" b="1" dirty="0">
+                <a:solidFill>
+                  <a:srgbClr val="E36414"/>
+                </a:solidFill>
+                <a:latin typeface="Meiryo" pitchFamily="34" charset="0"/>
+                <a:ea typeface="Meiryo" pitchFamily="34" charset="-122"/>
+                <a:cs typeface="Meiryo" pitchFamily="34" charset="-120"/>
+              </a:rPr>
+              <a:t>質問は GitHub の Issues へ（講義後も対応します）</a:t>
+            </a:r>
+            <a:endParaRPr lang="en-US" sz="2000" dirty="0"/>
+          </a:p>
+        </p:txBody>
+      </p:sp>
+      <p:sp>
+        <p:nvSpPr>
+          <p:cNvPr id="17" name="Text 14"/>
+          <p:cNvSpPr txBox="1"/>
+          <p:nvPr/>
+        </p:nvSpPr>
+        <p:spPr>
+          <a:xfrm>
+            <a:off x="685800" y="5093208"/>
+            <a:ext cx="10789920" cy="914400"/>
+          </a:xfrm>
+          <a:prstGeom prst="rect">
+            <a:avLst/>
+          </a:prstGeom>
+          <a:noFill/>
+          <a:ln/>
+        </p:spPr>
+        <p:txBody>
+          <a:bodyPr wrap="square" lIns="0" tIns="0" rIns="0" bIns="0" rtlCol="0" anchor="t">
+            <a:normAutofit/>
+          </a:bodyPr>
+          <a:lstStyle/>
+          <a:p>
+            <a:pPr marL="342900" indent="-342900">
+              <a:spcAft>
+                <a:spcPts val="400"/>
+              </a:spcAft>
+              <a:buSzPct val="100000"/>
+              <a:buChar char="•"/>
+            </a:pPr>
+            <a:r>
+              <a:rPr lang="en-US" sz="1400" dirty="0">
+                <a:solidFill>
+                  <a:srgbClr val="1F2A30"/>
+                </a:solidFill>
+                <a:latin typeface="Meiryo" pitchFamily="34" charset="0"/>
+                <a:ea typeface="Meiryo" pitchFamily="34" charset="-122"/>
+                <a:cs typeface="Meiryo" pitchFamily="34" charset="-120"/>
+              </a:rPr>
+              <a:t>リポジトリ上部の Issues タブ → New issue に質問を書く（GitHub アカウントが必要）</a:t>
+            </a:r>
+            <a:endParaRPr lang="en-US" sz="1400" dirty="0"/>
+          </a:p>
+          <a:p>
+            <a:pPr marL="342900" indent="-342900">
+              <a:spcAft>
+                <a:spcPts val="400"/>
+              </a:spcAft>
+              <a:buSzPct val="100000"/>
+              <a:buChar char="•"/>
+            </a:pPr>
+            <a:r>
+              <a:rPr lang="en-US" sz="1400" dirty="0">
+                <a:solidFill>
+                  <a:srgbClr val="1F2A30"/>
+                </a:solidFill>
+                <a:latin typeface="Meiryo" pitchFamily="34" charset="0"/>
+                <a:ea typeface="Meiryo" pitchFamily="34" charset="-122"/>
+                <a:cs typeface="Meiryo" pitchFamily="34" charset="-120"/>
+              </a:rPr>
+              <a:t>エラーのときは、実行したコマンド・表示されたエラー文・OS を書くと答えやすい</a:t>
+            </a:r>
+            <a:endParaRPr lang="en-US" sz="1400" dirty="0"/>
+          </a:p>
+          <a:p>
+            <a:pPr marL="342900" indent="-342900">
+              <a:spcAft>
+                <a:spcPts val="400"/>
+              </a:spcAft>
+              <a:buSzPct val="100000"/>
+              <a:buChar char="•"/>
+            </a:pPr>
+            <a:r>
+              <a:rPr lang="en-US" sz="1400" dirty="0">
+                <a:solidFill>
+                  <a:srgbClr val="1F2A30"/>
+                </a:solidFill>
+                <a:latin typeface="Meiryo" pitchFamily="34" charset="0"/>
+                <a:ea typeface="Meiryo" pitchFamily="34" charset="-122"/>
+                <a:cs typeface="Meiryo" pitchFamily="34" charset="-120"/>
+              </a:rPr>
+              <a:t>Issues は誰でも読める公開の場です。個人情報は書かないでください</a:t>
             </a:r>
             <a:endParaRPr lang="en-US" sz="1400" dirty="0"/>
           </a:p>
